--- a/atelier/atelier-f06-testimonial.pptx
+++ b/atelier/atelier-f06-testimonial.pptx
@@ -3684,7 +3684,7 @@
         </p:nvSpPr>
         <p:spPr>
           <a:xfrm>
-            <a:off x="3707413" y="3904357"/>
+            <a:off x="3707413" y="3925639"/>
             <a:ext cx="2872026" cy="247650"/>
           </a:xfrm>
           <a:prstGeom prst="rect">
@@ -3719,7 +3719,7 @@
         </p:nvSpPr>
         <p:spPr>
           <a:xfrm>
-            <a:off x="986790" y="4056757"/>
+            <a:off x="986790" y="4078039"/>
             <a:ext cx="1112520" cy="548580"/>
           </a:xfrm>
           <a:prstGeom prst="rect">
@@ -3758,7 +3758,7 @@
         </p:nvSpPr>
         <p:spPr>
           <a:xfrm>
-            <a:off x="1428750" y="4437757"/>
+            <a:off x="1428750" y="4459039"/>
             <a:ext cx="7429500" cy="1411337"/>
           </a:xfrm>
           <a:prstGeom prst="rect">
@@ -3797,8 +3797,8 @@
         </p:nvSpPr>
         <p:spPr>
           <a:xfrm>
-            <a:off x="4132421" y="6172944"/>
-            <a:ext cx="2022158" cy="200025"/>
+            <a:off x="4132421" y="6194227"/>
+            <a:ext cx="2022158" cy="157609"/>
           </a:xfrm>
           <a:prstGeom prst="rect">
             <a:avLst/>
@@ -3809,7 +3809,11 @@
           <a:bodyPr wrap="none" anchor="t" lIns="0" rIns="0" tIns="0" bIns="0"/>
           <a:lstStyle/>
           <a:p>
-            <a:pPr algn="ctr"/>
+            <a:pPr algn="ctr">
+              <a:lnSpc>
+                <a:spcPct val="92000"/>
+              </a:lnSpc>
+            </a:pPr>
             <a:r>
               <a:rPr sz="1350" i="1" b="0">
                 <a:solidFill>
@@ -3832,7 +3836,7 @@
         </p:nvSpPr>
         <p:spPr>
           <a:xfrm>
-            <a:off x="3829526" y="6487269"/>
+            <a:off x="3829526" y="6466136"/>
             <a:ext cx="2627948" cy="104775"/>
           </a:xfrm>
           <a:prstGeom prst="rect">
